--- a/tests/quality/fixtures/portability/templates/portability-4x3.pptx
+++ b/tests/quality/fixtures/portability/templates/portability-4x3.pptx
@@ -356,7 +356,7 @@
         <p:spPr>
           <a:xfrm>
             <a:off x="628650" y="1825625"/>
-            <a:ext cx="3886200" cy="4351338"/>
+            <a:ext cx="3840480" cy="4351338"/>
           </a:xfrm>
         </p:spPr>
         <p:txBody>
@@ -390,8 +390,8 @@
         </p:nvSpPr>
         <p:spPr>
           <a:xfrm>
-            <a:off x="4629150" y="1825625"/>
-            <a:ext cx="3886200" cy="4351338"/>
+            <a:off x="4674870" y="1825625"/>
+            <a:ext cx="3840480" cy="4351338"/>
           </a:xfrm>
         </p:spPr>
         <p:txBody>

--- a/tests/quality/fixtures/portability/templates/portability-4x3.pptx
+++ b/tests/quality/fixtures/portability/templates/portability-4x3.pptx
@@ -546,8 +546,8 @@
         </p:nvSpPr>
         <p:spPr>
           <a:xfrm>
-            <a:off x="1114425" y="685800"/>
-            <a:ext cx="7115175" cy="1851025"/>
+            <a:off x="1143000" y="1122363"/>
+            <a:ext cx="6858000" cy="2387600"/>
           </a:xfrm>
         </p:spPr>
         <p:txBody>
@@ -580,8 +580,8 @@
         </p:nvSpPr>
         <p:spPr>
           <a:xfrm>
-            <a:off x="1114425" y="2667000"/>
-            <a:ext cx="7115175" cy="1371600"/>
+            <a:off x="1143000" y="3602038"/>
+            <a:ext cx="6858000" cy="1655762"/>
           </a:xfrm>
         </p:spPr>
         <p:txBody>
